--- a/content/ai-enablement/ai-enablement-2-practitioner.pptx
+++ b/content/ai-enablement/ai-enablement-2-practitioner.pptx
@@ -4358,7 +4358,7 @@
                 </a:solidFill>
                 <a:latin typeface="Calibri"/>
               </a:rPr>
-              <a:t>DECKFM · AI ENABLEMENT SERIES · PART 2 OF 3</a:t>
+              <a:t>OZ RADIO · AI ENABLEMENT SERIES · PART 2 OF 3</a:t>
             </a:r>
           </a:p>
         </p:txBody>
@@ -5111,7 +5111,7 @@
                 </a:solidFill>
                 <a:latin typeface="Calibri"/>
               </a:rPr>
-              <a:t>DeckFM · AI enablement · Practitioner</a:t>
+              <a:t>Oz Radio · AI enablement · Practitioner</a:t>
             </a:r>
           </a:p>
         </p:txBody>
@@ -5925,7 +5925,7 @@
                 </a:solidFill>
                 <a:latin typeface="Calibri"/>
               </a:rPr>
-              <a:t>DeckFM · AI enablement · Practitioner</a:t>
+              <a:t>Oz Radio · AI enablement · Practitioner</a:t>
             </a:r>
           </a:p>
         </p:txBody>
@@ -6835,7 +6835,7 @@
                 </a:solidFill>
                 <a:latin typeface="Calibri"/>
               </a:rPr>
-              <a:t>DeckFM · AI enablement · Practitioner</a:t>
+              <a:t>Oz Radio · AI enablement · Practitioner</a:t>
             </a:r>
           </a:p>
         </p:txBody>
@@ -7413,7 +7413,7 @@
                 </a:solidFill>
                 <a:latin typeface="Calibri"/>
               </a:rPr>
-              <a:t>DeckFM · AI enablement · Practitioner</a:t>
+              <a:t>Oz Radio · AI enablement · Practitioner</a:t>
             </a:r>
           </a:p>
         </p:txBody>
@@ -8254,7 +8254,7 @@
                 </a:solidFill>
                 <a:latin typeface="Calibri"/>
               </a:rPr>
-              <a:t>DeckFM · AI enablement · Practitioner</a:t>
+              <a:t>Oz Radio · AI enablement · Practitioner</a:t>
             </a:r>
           </a:p>
         </p:txBody>
@@ -9010,7 +9010,7 @@
                 </a:solidFill>
                 <a:latin typeface="Calibri"/>
               </a:rPr>
-              <a:t>DeckFM · AI enablement · Practitioner</a:t>
+              <a:t>Oz Radio · AI enablement · Practitioner</a:t>
             </a:r>
           </a:p>
         </p:txBody>
@@ -9621,7 +9621,7 @@
                 </a:solidFill>
                 <a:latin typeface="Calibri"/>
               </a:rPr>
-              <a:t>DeckFM · AI enablement · Practitioner</a:t>
+              <a:t>Oz Radio · AI enablement · Practitioner</a:t>
             </a:r>
           </a:p>
         </p:txBody>
@@ -10438,7 +10438,7 @@
                 </a:solidFill>
                 <a:latin typeface="Calibri"/>
               </a:rPr>
-              <a:t>DeckFM · AI enablement · Practitioner</a:t>
+              <a:t>Oz Radio · AI enablement · Practitioner</a:t>
             </a:r>
           </a:p>
         </p:txBody>
@@ -11271,7 +11271,7 @@
                 </a:solidFill>
                 <a:latin typeface="Calibri"/>
               </a:rPr>
-              <a:t>DeckFM · AI enablement · Practitioner</a:t>
+              <a:t>Oz Radio · AI enablement · Practitioner</a:t>
             </a:r>
           </a:p>
         </p:txBody>
@@ -12274,7 +12274,7 @@
                 </a:solidFill>
                 <a:latin typeface="Calibri"/>
               </a:rPr>
-              <a:t>DeckFM · AI enablement · Practitioner</a:t>
+              <a:t>Oz Radio · AI enablement · Practitioner</a:t>
             </a:r>
           </a:p>
         </p:txBody>
@@ -13712,7 +13712,7 @@
                 </a:solidFill>
                 <a:latin typeface="Calibri"/>
               </a:rPr>
-              <a:t>DeckFM · AI enablement · Practitioner</a:t>
+              <a:t>Oz Radio · AI enablement · Practitioner</a:t>
             </a:r>
           </a:p>
         </p:txBody>
@@ -14583,7 +14583,7 @@
                 </a:solidFill>
                 <a:latin typeface="Calibri"/>
               </a:rPr>
-              <a:t>DeckFM · AI enablement · Practitioner</a:t>
+              <a:t>Oz Radio · AI enablement · Practitioner</a:t>
             </a:r>
           </a:p>
         </p:txBody>
